--- a/自动化模板5.pptx
+++ b/自动化模板5.pptx
@@ -3128,7 +3128,7 @@
             <a:pPr algn="just"/>
             <a:r>
               <a:rPr lang="en-US" altLang="zh-CN" dirty="0"/>
-              <a:t>AI_JUANQI </a:t>
+              <a:t> </a:t>
             </a:r>
             <a:r>
               <a:rPr lang="zh-CN" altLang="en-US" dirty="0"/>
@@ -3449,11 +3449,7 @@
             </a:r>
             <a:r>
               <a:rPr lang="zh-CN" altLang="en-US" sz="2400" dirty="0"/>
-              <a:t>主要集中在卷气</a:t>
-            </a:r>
-            <a:r>
-              <a:rPr lang="zh-CN" altLang="en-US" sz="2400" dirty="0"/>
-              <a:t>较多区</a:t>
+              <a:t>主要集中在卷气较多区</a:t>
             </a:r>
             <a:r>
               <a:rPr lang="en-US" altLang="zh-CN" sz="2400" dirty="0">
@@ -3477,7 +3473,7 @@
                   <a:srgbClr val="FF0000"/>
                 </a:solidFill>
               </a:rPr>
-              <a:t>方框标记部位</a:t>
+              <a:t>箭头标记部位</a:t>
             </a:r>
             <a:r>
               <a:rPr lang="en-US" altLang="zh-CN" sz="2400" dirty="0">
@@ -3834,8 +3830,8 @@
         </p:nvSpPr>
         <p:spPr>
           <a:xfrm>
-            <a:off x="179187" y="5957939"/>
-            <a:ext cx="11141476" cy="829945"/>
+            <a:off x="98542" y="6236704"/>
+            <a:ext cx="11141476" cy="460375"/>
           </a:xfrm>
           <a:prstGeom prst="rect">
             <a:avLst/>
@@ -3850,11 +3846,19 @@
           <a:p>
             <a:r>
               <a:rPr lang="zh-CN" altLang="en-US" sz="2400" dirty="0"/>
-              <a:t>铸件内氧化物含量较高，渣包体积太小，导致熔渣无法充分排出，</a:t>
+              <a:t>铸件内氧化物主要集中在</a:t>
+            </a:r>
+            <a:r>
+              <a:rPr lang="en-US" altLang="zh-CN" sz="2400" dirty="0"/>
+              <a:t>   </a:t>
             </a:r>
             <a:r>
               <a:rPr lang="zh-CN" altLang="en-US" sz="2400" dirty="0"/>
-              <a:t>氧化夹杂风险显著升高。</a:t>
+              <a:t>。建议加大对应部位的渣包</a:t>
+            </a:r>
+            <a:r>
+              <a:rPr lang="zh-CN" altLang="en-US" sz="2400" dirty="0"/>
+              <a:t>体积。</a:t>
             </a:r>
             <a:endParaRPr lang="zh-CN" altLang="en-US" sz="2400" dirty="0"/>
           </a:p>
@@ -3974,7 +3978,7 @@
           <a:p>
             <a:r>
               <a:rPr lang="zh-CN" altLang="en-US" sz="2400" dirty="0"/>
-              <a:t>铸件内氧化物含量较高，约为</a:t>
+              <a:t>铸件内氧化物含量约为</a:t>
             </a:r>
             <a:r>
               <a:rPr lang="en-US" altLang="zh-CN" sz="2400" dirty="0"/>
@@ -5135,8 +5139,8 @@
         </p:nvSpPr>
         <p:spPr>
           <a:xfrm>
-            <a:off x="70485" y="460375"/>
-            <a:ext cx="12041505" cy="5491480"/>
+            <a:off x="70485" y="727075"/>
+            <a:ext cx="5602605" cy="5224780"/>
           </a:xfrm>
           <a:prstGeom prst="rect">
             <a:avLst/>
@@ -5150,7 +5154,36 @@
           <a:p>
             <a:r>
               <a:rPr lang="en-US" altLang="zh-CN"/>
-              <a:t>VID_QIYA</a:t>
+              <a:t>VID_QIYA1</a:t>
+            </a:r>
+            <a:endParaRPr lang="en-US" altLang="zh-CN"/>
+          </a:p>
+        </p:txBody>
+      </p:sp>
+      <p:sp>
+        <p:nvSpPr>
+          <p:cNvPr id="2" name="文本框 1"/>
+          <p:cNvSpPr txBox="1"/>
+          <p:nvPr/>
+        </p:nvSpPr>
+        <p:spPr>
+          <a:xfrm>
+            <a:off x="6077585" y="854075"/>
+            <a:ext cx="5602605" cy="5224780"/>
+          </a:xfrm>
+          <a:prstGeom prst="rect">
+            <a:avLst/>
+          </a:prstGeom>
+          <a:noFill/>
+        </p:spPr>
+        <p:txBody>
+          <a:bodyPr wrap="square" rtlCol="0">
+            <a:noAutofit/>
+          </a:bodyPr>
+          <a:p>
+            <a:r>
+              <a:rPr lang="en-US" altLang="zh-CN"/>
+              <a:t>VID_QIYA2</a:t>
             </a:r>
             <a:endParaRPr lang="en-US" altLang="zh-CN"/>
           </a:p>
@@ -5225,8 +5258,8 @@
         </p:nvSpPr>
         <p:spPr>
           <a:xfrm>
-            <a:off x="70485" y="197485"/>
-            <a:ext cx="12041505" cy="5491480"/>
+            <a:off x="70485" y="438150"/>
+            <a:ext cx="5839460" cy="5250815"/>
           </a:xfrm>
           <a:prstGeom prst="rect">
             <a:avLst/>
@@ -5240,7 +5273,36 @@
           <a:p>
             <a:r>
               <a:rPr lang="en-US" altLang="zh-CN"/>
-              <a:t>IMG_QIYA</a:t>
+              <a:t>IMG_QIYA1</a:t>
+            </a:r>
+            <a:endParaRPr lang="en-US" altLang="zh-CN"/>
+          </a:p>
+        </p:txBody>
+      </p:sp>
+      <p:sp>
+        <p:nvSpPr>
+          <p:cNvPr id="2" name="文本框 1"/>
+          <p:cNvSpPr txBox="1"/>
+          <p:nvPr/>
+        </p:nvSpPr>
+        <p:spPr>
+          <a:xfrm>
+            <a:off x="6036945" y="565150"/>
+            <a:ext cx="5839460" cy="5250815"/>
+          </a:xfrm>
+          <a:prstGeom prst="rect">
+            <a:avLst/>
+          </a:prstGeom>
+          <a:noFill/>
+        </p:spPr>
+        <p:txBody>
+          <a:bodyPr wrap="square" rtlCol="0">
+            <a:noAutofit/>
+          </a:bodyPr>
+          <a:p>
+            <a:r>
+              <a:rPr lang="en-US" altLang="zh-CN"/>
+              <a:t>IMG_QIYA2</a:t>
             </a:r>
             <a:endParaRPr lang="en-US" altLang="zh-CN"/>
           </a:p>
@@ -5450,7 +5512,13 @@
               <a:rPr lang="en-US" altLang="zh-CN" sz="3200" dirty="0">
                 <a:sym typeface="+mn-ea"/>
               </a:rPr>
-              <a:t>0.55%</a:t>
+              <a:t>VAL_</a:t>
+            </a:r>
+            <a:r>
+              <a:rPr lang="en-US" altLang="zh-CN" sz="3200">
+                <a:sym typeface="+mn-ea"/>
+              </a:rPr>
+              <a:t>suokonglv </a:t>
             </a:r>
             <a:r>
               <a:rPr lang="zh-CN" altLang="en-US" sz="3200" dirty="0">
@@ -5462,7 +5530,19 @@
               <a:rPr lang="en-US" altLang="zh-CN" sz="3200" dirty="0">
                 <a:sym typeface="+mn-ea"/>
               </a:rPr>
-              <a:t>25cm³</a:t>
+              <a:t> </a:t>
+            </a:r>
+            <a:r>
+              <a:rPr lang="en-US" altLang="zh-CN" sz="3200" dirty="0">
+                <a:sym typeface="+mn-ea"/>
+              </a:rPr>
+              <a:t>VAL_</a:t>
+            </a:r>
+            <a:r>
+              <a:rPr lang="en-US" altLang="zh-CN" sz="3200">
+                <a:sym typeface="+mn-ea"/>
+              </a:rPr>
+              <a:t>suokongtiji </a:t>
             </a:r>
             <a:r>
               <a:rPr lang="zh-CN" altLang="en-US" sz="3200" dirty="0">
@@ -5746,7 +5826,7 @@
             <a:pPr algn="just"/>
             <a:r>
               <a:rPr lang="en-US" altLang="zh-CN" dirty="0"/>
-              <a:t>AI_wendu  </a:t>
+              <a:t> </a:t>
             </a:r>
             <a:r>
               <a:rPr lang="zh-CN" altLang="en-US" dirty="0"/>
